--- a/Foundation_F6/F6-L12_Final_Review_and_Assessment_My_Town_and_Transport.pptx
+++ b/Foundation_F6/F6-L12_Final_Review_and_Assessment_My_Town_and_Transport.pptx
@@ -525,7 +525,11 @@
           <a:lstStyle/>
           <a:p>
             <a:r>
-              <a:rPr lang="en-US" dirty="0"/>
+              <a:rPr lang="ar-SA" dirty="0">
+                <a:latin typeface="Amiri" pitchFamily="2" charset="-78"/>
+                <a:ea typeface="Amiri" pitchFamily="2" charset="-78"/>
+                <a:cs typeface="Amiri" pitchFamily="2" charset="-78"/>
+              </a:rPr>
               <a:t>LESSON AT A GLANCE — planned for 56 minutes, leaving about 4 minutes for Teams delays.
 0–1 Welcome · 1–2 Map · 2–6 Readiness check (not marked) · 6–8 Grammar review + assessment map · 8–22 Listening (20) · 22–30 Reading (10) · 30–46 Writing (20) · 46–56 Speaking (10, one-to-one or trusted pairs) · 56–60 Profile and D1 step.
 FLEX slides are optional. Use them if the class is moving quickly; otherwise the same activities are on the website for homework.
@@ -804,7 +808,11 @@
           <a:lstStyle/>
           <a:p>
             <a:r>
-              <a:rPr lang="en-US" dirty="0"/>
+              <a:rPr lang="ar-SA" dirty="0">
+                <a:latin typeface="Amiri" pitchFamily="2" charset="-78"/>
+                <a:ea typeface="Amiri" pitchFamily="2" charset="-78"/>
+                <a:cs typeface="Amiri" pitchFamily="2" charset="-78"/>
+              </a:rPr>
               <a:t>LISTENING TEXT 2 · 6 QUESTIONS (website). Read twice at natural pace (website: “Read each set first. Listen twice.”); students answer after the second reading.
 SCRIPT: سَلْمَى: أَسْكُنُ فِي مَدِينَةٍ حَدِيثَةٍ تَتَمَيَّزُ بِمِتْرُو سَرِيعٍ وَمَرْكَزٍ تِجَارِيٍّ كَبِيرٍ. مِنْ مَزَايَاهَا أَنَّ المَوَاصَلَاتِ مُنَظَّمَةٌ، وَلٰكِنَّ الشَّوَارِعَ مُكْتَظَّةٌ. أَذْهَبُ إِلَى الجَامِعَةِ بِالمِتْرُو. حَسَنٌ: أَمَّا أَنَا فَأَسْكُنُ فِي بَلْدَةٍ تَارِيخِيَّةٍ هَادِئَةٍ. تُوجَدُ فِيهَا أَسْوَاقٌ قَدِيمَةٌ وَمَبَانٍ مَبْنِيَّةٌ مِنَ الحَجَرِ. لَا يُوجَدُ مِتْرُو، لِذٰلِكَ أَتَنَقَّلُ بِالحَافِلَةِ أَوْ مَشْيًا. نَحْنُ الاثْنَانِ نُحِبُّ مَكَانَ سَكَنِنَا، وَلٰكِنَّنَا نُرِيدُ مَوَاصَلَاتٍ أَنْظَفَ.
 Private chat: 6 letters.</a:t>
@@ -982,7 +990,11 @@
           <a:lstStyle/>
           <a:p>
             <a:r>
-              <a:rPr lang="en-US" dirty="0"/>
+              <a:rPr lang="ar-SA" dirty="0">
+                <a:latin typeface="Amiri" pitchFamily="2" charset="-78"/>
+                <a:ea typeface="Amiri" pitchFamily="2" charset="-78"/>
+                <a:cs typeface="Amiri" pitchFamily="2" charset="-78"/>
+              </a:rPr>
               <a:t>LISTENING TEXT 3 · 2 QUESTIONS (website). Read twice at natural pace (website: “Read each set first. Listen twice.”); students answer after the second reading.
 SCRIPT: مَرْحَبًا بِكُمْ فِي مَدِينَةِ الوَاحَةِ. يَقَعُ الحَيُّ التَّارِيخِيُّ فِي شَمَالِ المَدِينَةِ، وَيَتَمَيَّزُ بِبُيُوتٍ مَبْنِيَّةٍ مِنَ الطِّينِ وَالحَجَرِ. فِي الوَسَطِ تُوجَدُ قَلْعَةٌ قَدِيمَةٌ وَسُوقٌ شَعْبِيٌّ. المَطَارُ خَارِجَ المَدِينَةِ، وَتَسْتَغْرِقُ الرِّحْلَةُ إِلَيْهِ نِصْفَ سَاعَةٍ بِسَيَّارَةِ الأُجْرَةِ. أَنْصَحُ الزُّوَّارَ بِاسْتِقْلَالِ الحَافِلَةِ فِي المَرْكَزِ لِأَنَّهَا رَخِيصَةٌ، وَبِالمَشْيِ فِي الحَيِّ القَدِيمِ لِأَنَّ شَوَارِعَهُ ضَيِّقَةٌ.
 Private chat: 2 letters.</a:t>
@@ -1512,7 +1524,11 @@
           <a:lstStyle/>
           <a:p>
             <a:r>
-              <a:rPr lang="en-US" dirty="0"/>
+              <a:rPr lang="ar-SA" dirty="0">
+                <a:latin typeface="Amiri" pitchFamily="2" charset="-78"/>
+                <a:ea typeface="Amiri" pitchFamily="2" charset="-78"/>
+                <a:cs typeface="Amiri" pitchFamily="2" charset="-78"/>
+              </a:rPr>
               <a:t>WELCOME (1 min) — while students join.
 • Greet each student by name as they arrive: السَّلَامُ عَلَيْكُمْ. Take the register (Pastoral Tracker: attendance 0/1).
 • 2-MINUTE CHECK-IN (SEND training): a private chat to any student who seemed unsettled last lesson — “Are you okay today? 👍 / 👎”.
@@ -1781,7 +1797,11 @@
           <a:lstStyle/>
           <a:p>
             <a:r>
-              <a:rPr lang="en-US" dirty="0"/>
+              <a:rPr lang="ar-SA" dirty="0">
+                <a:latin typeface="Amiri" pitchFamily="2" charset="-78"/>
+                <a:ea typeface="Amiri" pitchFamily="2" charset="-78"/>
+                <a:cs typeface="Amiri" pitchFamily="2" charset="-78"/>
+              </a:rPr>
               <a:t>WRITING TASK 2 (website, 15 marks): 80–100 words on one route. Suggested strands (as in F3–F5): task completion (5) · range of F6 structures (5) · accuracy (5).
 The F6-L09 website model answer (أَسْكُنُ فِي مَدِينَةٍ مُتَوَسِّطَةٍ وَحَدِيثَةٍ …) is the full-mark exemplar — show it ONLY after writing.</a:t>
             </a:r>
@@ -1870,7 +1890,11 @@
           <a:lstStyle/>
           <a:p>
             <a:r>
-              <a:rPr lang="en-US" dirty="0"/>
+              <a:rPr lang="ar-SA" dirty="0">
+                <a:latin typeface="Amiri" pitchFamily="2" charset="-78"/>
+                <a:ea typeface="Amiri" pitchFamily="2" charset="-78"/>
+                <a:cs typeface="Amiri" pitchFamily="2" charset="-78"/>
+              </a:rPr>
               <a:t>SPEAKING (website, 10 marks). Website possible questions: صِفْ مَدِينَتَكَ. · كَيْفَ تَتَنَقَّلُ فِي مَدِينَتِكَ؟ · مَا مَزَايَا مَدِينَتِكَ وَعُيُوبُهَا؟ · أَيْنَ أَقْرَبُ مَحَطَّةٍ؟ · كَيْفَ أَذْهَبُ إِلَى المَتْحَفِ؟
 To a girl: صِفِي مَدِينَتَكِ · كَيْفَ تَتَنَقَّلِينَ فِي مَدِينَتِكِ؟
 Website preparation notes (three boxes): places and description · transport and duration · advantage, disadvantage and direction.
@@ -2588,7 +2612,11 @@
           <a:lstStyle/>
           <a:p>
             <a:r>
-              <a:rPr lang="en-US" dirty="0"/>
+              <a:rPr lang="ar-SA" dirty="0">
+                <a:latin typeface="Amiri" pitchFamily="2" charset="-78"/>
+                <a:ea typeface="Amiri" pitchFamily="2" charset="-78"/>
+                <a:cs typeface="Amiri" pitchFamily="2" charset="-78"/>
+              </a:rPr>
               <a:t>REVIEW (website “Complete F6 grammar review”): 1 Existence and gender (يُوجَدُ + مُذَكَّرٌ · تُوجَدُ + مُؤَنَّثٌ) · 2 Movement and direction (بِـ / عَلَى / مَشْيًا · اِذْهَبْ / اِذْهَبِي / اِذْهَبُوا) · 3 Prices and duration (كَمْ ثَمَنُهُ / ثَمَنُهَا؟ · تَسْتَغْرِقُ + مُدَّةً) · 4 Buildings and balanced judgement (مَبْنِيٌّ / مَبْنِيَّةٌ مِنْ · مِنْ مَزَايَا / عُيُوبِ … أَنَّ).
 Website grammar questions (quick oral round if time): تُوجَدُ مَكْتَبَةٌ · اِنْعَطِفِي يَمِينًا (one female) · أَرْخَصُ مِنْ · البَيْتُ مَبْنِيٌّ مِنَ الحَجَرِ · مِنْ مَزَايَا المَدِينَةِ أَنَّ … · الرِّحْلَةُ ← تَسْتَغْرِقُ · يَتَمَيَّزُ بِـ.
 NOTE: website grammar question 2 gives عَلَى الدَّرَّاجَةِ as the accurate answer and “بِالدَّرَّاجَةِ always” as wrong; both are used — F6-L03 taught بِالدَّرَّاجَةِ. Accept either in writing and speaking.
@@ -2767,7 +2795,11 @@
           <a:lstStyle/>
           <a:p>
             <a:r>
-              <a:rPr lang="en-US" dirty="0"/>
+              <a:rPr lang="ar-SA" dirty="0">
+                <a:latin typeface="Amiri" pitchFamily="2" charset="-78"/>
+                <a:ea typeface="Amiri" pitchFamily="2" charset="-78"/>
+                <a:cs typeface="Amiri" pitchFamily="2" charset="-78"/>
+              </a:rPr>
               <a:t>LISTENING TEXT 1 · QUESTIONS 1–4 (website). Read twice at natural pace (website: “Read each set first. Listen twice.”); students answer after the second reading.
 SCRIPT: السَّائِحُ: مِنْ فَضْلِكَ، أَيْنَ مَحَطَّةُ القِطَارِ؟ المُوَاطِنُ: اِذْهَبْ مُسْتَقِيمًا حَتَّى إِشَارَةِ المُرُورِ، ثُمَّ اِنْعَطِفْ يَمِينًا. سَتَمُرُّ بِمَكْتَبَةٍ كَبِيرَةٍ عَلَى يَسَارِكَ، وَالمَحَطَّةُ خَلْفَ المَكْتَبَةِ. هِيَ قَرِيبَةٌ؛ تَسْتَغْرِقُ المَسَافَةُ عَشْرَ دَقَائِقَ مَشْيًا. اِشْتَرِ تَذْكِرَةَ ذَهَابٍ وَإِيَابٍ مِنَ الشُّبَّاكِ الثَّانِي. يُغَادِرُ القِطَارُ مِنَ الرَّصِيفِ الرَّابِعِ فِي السَّاعَةِ العَاشِرَةِ وَالنِّصْفِ. الرِّحْلَةُ تَسْتَغْرِقُ خَمْسًا وَأَرْبَعِينَ دَقِيقَةً. فِي العَوْدَةِ أَنْصَحُكَ بِالحَافِلَةِ لِأَنَّهَا أَرْخَصُ، وَلٰكِنَّ القِطَارَ أَسْرَعُ.
 Private chat: 4 letters.</a:t>
@@ -3341,6 +3373,7 @@
                   <a:srgbClr val="D4AF37"/>
                 </a:solidFill>
                 <a:latin typeface="Amiri" pitchFamily="2" charset="-78"/>
+                <a:ea typeface="Amiri" pitchFamily="2" charset="-78"/>
                 <a:cs typeface="Amiri" pitchFamily="2" charset="-78"/>
               </a:rPr>
               <a:t>م</a:t>
@@ -3547,6 +3580,7 @@
                   <a:srgbClr val="D4AF37"/>
                 </a:solidFill>
                 <a:latin typeface="Amiri" pitchFamily="2" charset="-78"/>
+                <a:ea typeface="Amiri" pitchFamily="2" charset="-78"/>
                 <a:cs typeface="Amiri" pitchFamily="2" charset="-78"/>
               </a:rPr>
               <a:t>المُرَاجَعَةُ النِّهَائِيَّةُ وَتَقْيِيمُ الوَحْدَةِ</a:t>
@@ -4004,6 +4038,7 @@
                   <a:srgbClr val="D4AF37"/>
                 </a:solidFill>
                 <a:latin typeface="Amiri" pitchFamily="2" charset="-78"/>
+                <a:ea typeface="Amiri" pitchFamily="2" charset="-78"/>
                 <a:cs typeface="Amiri" pitchFamily="2" charset="-78"/>
               </a:rPr>
               <a:t>م</a:t>
@@ -4324,6 +4359,7 @@
                   <a:srgbClr val="8A6D1E"/>
                 </a:solidFill>
                 <a:latin typeface="Amiri" pitchFamily="2" charset="-78"/>
+                <a:ea typeface="Amiri" pitchFamily="2" charset="-78"/>
                 <a:cs typeface="Amiri" pitchFamily="2" charset="-78"/>
               </a:rPr>
               <a:t>الاِسْتِمَاعُ</a:t>
@@ -6247,6 +6283,7 @@
                   <a:srgbClr val="D4AF37"/>
                 </a:solidFill>
                 <a:latin typeface="Amiri" pitchFamily="2" charset="-78"/>
+                <a:ea typeface="Amiri" pitchFamily="2" charset="-78"/>
                 <a:cs typeface="Amiri" pitchFamily="2" charset="-78"/>
               </a:rPr>
               <a:t>م</a:t>
@@ -6567,6 +6604,7 @@
                   <a:srgbClr val="8A6D1E"/>
                 </a:solidFill>
                 <a:latin typeface="Amiri" pitchFamily="2" charset="-78"/>
+                <a:ea typeface="Amiri" pitchFamily="2" charset="-78"/>
                 <a:cs typeface="Amiri" pitchFamily="2" charset="-78"/>
               </a:rPr>
               <a:t>الإِجَابَاتُ</a:t>
@@ -7108,6 +7146,7 @@
                   <a:srgbClr val="8A6D1E"/>
                 </a:solidFill>
                 <a:latin typeface="Amiri" pitchFamily="2" charset="-78"/>
+                <a:ea typeface="Amiri" pitchFamily="2" charset="-78"/>
                 <a:cs typeface="Amiri" pitchFamily="2" charset="-78"/>
               </a:rPr>
               <a:t>تَذْكِرَةَ ذَهَابٍ وَإِيَابٍ</a:t>
@@ -7611,6 +7650,7 @@
                   <a:srgbClr val="8A6D1E"/>
                 </a:solidFill>
                 <a:latin typeface="Amiri" pitchFamily="2" charset="-78"/>
+                <a:ea typeface="Amiri" pitchFamily="2" charset="-78"/>
                 <a:cs typeface="Amiri" pitchFamily="2" charset="-78"/>
               </a:rPr>
               <a:t>مِنَ الرَّصِيفِ الرَّابِعِ</a:t>
@@ -8114,6 +8154,7 @@
                   <a:srgbClr val="8A6D1E"/>
                 </a:solidFill>
                 <a:latin typeface="Amiri" pitchFamily="2" charset="-78"/>
+                <a:ea typeface="Amiri" pitchFamily="2" charset="-78"/>
                 <a:cs typeface="Amiri" pitchFamily="2" charset="-78"/>
               </a:rPr>
               <a:t>فِي السَّاعَةِ العَاشِرَةِ وَالنِّصْفِ</a:t>
@@ -8617,6 +8658,7 @@
                   <a:srgbClr val="8A6D1E"/>
                 </a:solidFill>
                 <a:latin typeface="Amiri" pitchFamily="2" charset="-78"/>
+                <a:ea typeface="Amiri" pitchFamily="2" charset="-78"/>
                 <a:cs typeface="Amiri" pitchFamily="2" charset="-78"/>
               </a:rPr>
               <a:t>لِأَنَّهَا أَرْخَصُ</a:t>
@@ -8750,6 +8792,7 @@
                   <a:srgbClr val="D4AF37"/>
                 </a:solidFill>
                 <a:latin typeface="Amiri" pitchFamily="2" charset="-78"/>
+                <a:ea typeface="Amiri" pitchFamily="2" charset="-78"/>
                 <a:cs typeface="Amiri" pitchFamily="2" charset="-78"/>
               </a:rPr>
               <a:t>م</a:t>
@@ -9070,6 +9113,7 @@
                   <a:srgbClr val="8A6D1E"/>
                 </a:solidFill>
                 <a:latin typeface="Amiri" pitchFamily="2" charset="-78"/>
+                <a:ea typeface="Amiri" pitchFamily="2" charset="-78"/>
                 <a:cs typeface="Amiri" pitchFamily="2" charset="-78"/>
               </a:rPr>
               <a:t>الاِسْتِمَاعُ</a:t>
@@ -11869,6 +11913,7 @@
                   <a:srgbClr val="D4AF37"/>
                 </a:solidFill>
                 <a:latin typeface="Amiri" pitchFamily="2" charset="-78"/>
+                <a:ea typeface="Amiri" pitchFamily="2" charset="-78"/>
                 <a:cs typeface="Amiri" pitchFamily="2" charset="-78"/>
               </a:rPr>
               <a:t>م</a:t>
@@ -12189,6 +12234,7 @@
                   <a:srgbClr val="8A6D1E"/>
                 </a:solidFill>
                 <a:latin typeface="Amiri" pitchFamily="2" charset="-78"/>
+                <a:ea typeface="Amiri" pitchFamily="2" charset="-78"/>
                 <a:cs typeface="Amiri" pitchFamily="2" charset="-78"/>
               </a:rPr>
               <a:t>الإِجَابَاتُ</a:t>
@@ -15150,6 +15196,7 @@
                   <a:srgbClr val="D4AF37"/>
                 </a:solidFill>
                 <a:latin typeface="Amiri" pitchFamily="2" charset="-78"/>
+                <a:ea typeface="Amiri" pitchFamily="2" charset="-78"/>
                 <a:cs typeface="Amiri" pitchFamily="2" charset="-78"/>
               </a:rPr>
               <a:t>م</a:t>
@@ -15470,6 +15517,7 @@
                   <a:srgbClr val="8A6D1E"/>
                 </a:solidFill>
                 <a:latin typeface="Amiri" pitchFamily="2" charset="-78"/>
+                <a:ea typeface="Amiri" pitchFamily="2" charset="-78"/>
                 <a:cs typeface="Amiri" pitchFamily="2" charset="-78"/>
               </a:rPr>
               <a:t>الاِسْتِمَاعُ</a:t>
@@ -16517,6 +16565,7 @@
                   <a:srgbClr val="D4AF37"/>
                 </a:solidFill>
                 <a:latin typeface="Amiri" pitchFamily="2" charset="-78"/>
+                <a:ea typeface="Amiri" pitchFamily="2" charset="-78"/>
                 <a:cs typeface="Amiri" pitchFamily="2" charset="-78"/>
               </a:rPr>
               <a:t>م</a:t>
@@ -16837,6 +16886,7 @@
                   <a:srgbClr val="8A6D1E"/>
                 </a:solidFill>
                 <a:latin typeface="Amiri" pitchFamily="2" charset="-78"/>
+                <a:ea typeface="Amiri" pitchFamily="2" charset="-78"/>
                 <a:cs typeface="Amiri" pitchFamily="2" charset="-78"/>
               </a:rPr>
               <a:t>الإِجَابَاتُ</a:t>
@@ -17378,6 +17428,7 @@
                   <a:srgbClr val="8A6D1E"/>
                 </a:solidFill>
                 <a:latin typeface="Amiri" pitchFamily="2" charset="-78"/>
+                <a:ea typeface="Amiri" pitchFamily="2" charset="-78"/>
                 <a:cs typeface="Amiri" pitchFamily="2" charset="-78"/>
               </a:rPr>
               <a:t>يَقَعُ الحَيُّ التَّارِيخِيُّ فِي شَمَالِ المَدِينَةِ</a:t>
@@ -17881,6 +17932,7 @@
                   <a:srgbClr val="8A6D1E"/>
                 </a:solidFill>
                 <a:latin typeface="Amiri" pitchFamily="2" charset="-78"/>
+                <a:ea typeface="Amiri" pitchFamily="2" charset="-78"/>
                 <a:cs typeface="Amiri" pitchFamily="2" charset="-78"/>
               </a:rPr>
               <a:t>أَنْصَحُ الزُّوَّارَ بِاسْتِقْلَالِ الحَافِلَةِ فِي المَرْكَزِ</a:t>
@@ -18014,6 +18066,7 @@
                   <a:srgbClr val="D4AF37"/>
                 </a:solidFill>
                 <a:latin typeface="Amiri" pitchFamily="2" charset="-78"/>
+                <a:ea typeface="Amiri" pitchFamily="2" charset="-78"/>
                 <a:cs typeface="Amiri" pitchFamily="2" charset="-78"/>
               </a:rPr>
               <a:t>م</a:t>
@@ -18334,6 +18387,7 @@
                   <a:srgbClr val="8A6D1E"/>
                 </a:solidFill>
                 <a:latin typeface="Amiri" pitchFamily="2" charset="-78"/>
+                <a:ea typeface="Amiri" pitchFamily="2" charset="-78"/>
                 <a:cs typeface="Amiri" pitchFamily="2" charset="-78"/>
               </a:rPr>
               <a:t>مَدِينَةُ السَّلَامِ</a:t>
@@ -18447,6 +18501,7 @@
                   <a:srgbClr val="1F2A37"/>
                 </a:solidFill>
                 <a:latin typeface="Amiri" pitchFamily="2" charset="-78"/>
+                <a:ea typeface="Amiri" pitchFamily="2" charset="-78"/>
                 <a:cs typeface="Amiri" pitchFamily="2" charset="-78"/>
               </a:rPr>
               <a:t>مَدِينَةُ السَّلَامِ مَدِينَةٌ سَاحِلِيَّةٌ مُتَوَسِّطَةُ الحَجْمِ. فِي مَرْكَزِهَا تُوجَدُ مَكْتَبَةٌ حَدِيثَةٌ وَمَتْحَفٌ مَبْنِيٌّ مِنَ الحَجَرِ. أَمَّا المَحَطَّةُ فَهِيَ مُقَابِلَ السُّوقِ وَقَرِيبَةٌ مِنَ الفُنْدُقِ. أَذْهَبُ إِلَى المَدْرَسَةِ بِالحَافِلَةِ، وَتَسْتَغْرِقُ الرِّحْلَةُ خَمْسًا وَعِشْرِينَ دَقِيقَةً. مِنْ مَزَايَا المَدِينَةِ أَنَّ المَوَاصَلَاتِ رَخِيصَةٌ وَأَنَّ الحَدَائِقَ نَظِيفَةٌ. وَلٰكِنْ مِنْ عُيُوبِهَا أَنَّ الطُّرُقَ مُزْدَحِمَةٌ فِي الصَّبَاحِ. بِصِفَةٍ عَامَّةٍ أُحِبُّ مَدِينَتِي لِأَنَّهَا آمِنَةٌ وَنَشِيطَةٌ.</a:t>
@@ -18580,6 +18635,7 @@
                   <a:srgbClr val="D4AF37"/>
                 </a:solidFill>
                 <a:latin typeface="Amiri" pitchFamily="2" charset="-78"/>
+                <a:ea typeface="Amiri" pitchFamily="2" charset="-78"/>
                 <a:cs typeface="Amiri" pitchFamily="2" charset="-78"/>
               </a:rPr>
               <a:t>م</a:t>
@@ -18900,6 +18956,7 @@
                   <a:srgbClr val="8A6D1E"/>
                 </a:solidFill>
                 <a:latin typeface="Amiri" pitchFamily="2" charset="-78"/>
+                <a:ea typeface="Amiri" pitchFamily="2" charset="-78"/>
                 <a:cs typeface="Amiri" pitchFamily="2" charset="-78"/>
               </a:rPr>
               <a:t>أَسْئِلَةُ القِرَاءَةِ</a:t>
@@ -21261,6 +21318,7 @@
                   <a:srgbClr val="D4AF37"/>
                 </a:solidFill>
                 <a:latin typeface="Amiri" pitchFamily="2" charset="-78"/>
+                <a:ea typeface="Amiri" pitchFamily="2" charset="-78"/>
                 <a:cs typeface="Amiri" pitchFamily="2" charset="-78"/>
               </a:rPr>
               <a:t>م</a:t>
@@ -21581,6 +21639,7 @@
                   <a:srgbClr val="8A6D1E"/>
                 </a:solidFill>
                 <a:latin typeface="Amiri" pitchFamily="2" charset="-78"/>
+                <a:ea typeface="Amiri" pitchFamily="2" charset="-78"/>
                 <a:cs typeface="Amiri" pitchFamily="2" charset="-78"/>
               </a:rPr>
               <a:t>الإِجَابَاتُ</a:t>
@@ -22122,6 +22181,7 @@
                   <a:srgbClr val="8A6D1E"/>
                 </a:solidFill>
                 <a:latin typeface="Amiri" pitchFamily="2" charset="-78"/>
+                <a:ea typeface="Amiri" pitchFamily="2" charset="-78"/>
                 <a:cs typeface="Amiri" pitchFamily="2" charset="-78"/>
               </a:rPr>
               <a:t>مَدِينَةٌ سَاحِلِيَّةٌ مُتَوَسِّطَةُ الحَجْمِ</a:t>
@@ -22625,6 +22685,7 @@
                   <a:srgbClr val="8A6D1E"/>
                 </a:solidFill>
                 <a:latin typeface="Amiri" pitchFamily="2" charset="-78"/>
+                <a:ea typeface="Amiri" pitchFamily="2" charset="-78"/>
                 <a:cs typeface="Amiri" pitchFamily="2" charset="-78"/>
               </a:rPr>
               <a:t>مَتْحَفٌ مَبْنِيٌّ مِنَ الحَجَرِ</a:t>
@@ -23128,6 +23189,7 @@
                   <a:srgbClr val="8A6D1E"/>
                 </a:solidFill>
                 <a:latin typeface="Amiri" pitchFamily="2" charset="-78"/>
+                <a:ea typeface="Amiri" pitchFamily="2" charset="-78"/>
                 <a:cs typeface="Amiri" pitchFamily="2" charset="-78"/>
               </a:rPr>
               <a:t>مُقَابِلَ السُّوقِ</a:t>
@@ -23631,6 +23693,7 @@
                   <a:srgbClr val="8A6D1E"/>
                 </a:solidFill>
                 <a:latin typeface="Amiri" pitchFamily="2" charset="-78"/>
+                <a:ea typeface="Amiri" pitchFamily="2" charset="-78"/>
                 <a:cs typeface="Amiri" pitchFamily="2" charset="-78"/>
               </a:rPr>
               <a:t>قَرِيبَةٌ مِنَ الفُنْدُقِ</a:t>
@@ -24134,6 +24197,7 @@
                   <a:srgbClr val="8A6D1E"/>
                 </a:solidFill>
                 <a:latin typeface="Amiri" pitchFamily="2" charset="-78"/>
+                <a:ea typeface="Amiri" pitchFamily="2" charset="-78"/>
                 <a:cs typeface="Amiri" pitchFamily="2" charset="-78"/>
               </a:rPr>
               <a:t>بِالحَافِلَةِ</a:t>
@@ -24267,6 +24331,7 @@
                   <a:srgbClr val="D4AF37"/>
                 </a:solidFill>
                 <a:latin typeface="Amiri" pitchFamily="2" charset="-78"/>
+                <a:ea typeface="Amiri" pitchFamily="2" charset="-78"/>
                 <a:cs typeface="Amiri" pitchFamily="2" charset="-78"/>
               </a:rPr>
               <a:t>م</a:t>
@@ -24587,6 +24652,7 @@
                   <a:srgbClr val="8A6D1E"/>
                 </a:solidFill>
                 <a:latin typeface="Amiri" pitchFamily="2" charset="-78"/>
+                <a:ea typeface="Amiri" pitchFamily="2" charset="-78"/>
                 <a:cs typeface="Amiri" pitchFamily="2" charset="-78"/>
               </a:rPr>
               <a:t>أَسْئِلَةُ القِرَاءَةِ</a:t>
@@ -26613,6 +26679,7 @@
                   <a:srgbClr val="1F2A37"/>
                 </a:solidFill>
                 <a:latin typeface="Amiri" pitchFamily="2" charset="-78"/>
+                <a:ea typeface="Amiri" pitchFamily="2" charset="-78"/>
                 <a:cs typeface="Amiri" pitchFamily="2" charset="-78"/>
               </a:rPr>
               <a:t>لِأَنَّهَا سَاحِلِيَّةٌ</a:t>
@@ -26714,6 +26781,7 @@
                   <a:srgbClr val="1F2A37"/>
                 </a:solidFill>
                 <a:latin typeface="Amiri" pitchFamily="2" charset="-78"/>
+                <a:ea typeface="Amiri" pitchFamily="2" charset="-78"/>
                 <a:cs typeface="Amiri" pitchFamily="2" charset="-78"/>
               </a:rPr>
               <a:t>لِأَنَّهَا مُزْدَحِمَةٌ</a:t>
@@ -26815,6 +26883,7 @@
                   <a:srgbClr val="1F2A37"/>
                 </a:solidFill>
                 <a:latin typeface="Amiri" pitchFamily="2" charset="-78"/>
+                <a:ea typeface="Amiri" pitchFamily="2" charset="-78"/>
                 <a:cs typeface="Amiri" pitchFamily="2" charset="-78"/>
               </a:rPr>
               <a:t>لِأَنَّهَا آمِنَةٌ</a:t>
@@ -26948,6 +27017,7 @@
                   <a:srgbClr val="D4AF37"/>
                 </a:solidFill>
                 <a:latin typeface="Amiri" pitchFamily="2" charset="-78"/>
+                <a:ea typeface="Amiri" pitchFamily="2" charset="-78"/>
                 <a:cs typeface="Amiri" pitchFamily="2" charset="-78"/>
               </a:rPr>
               <a:t>م</a:t>
@@ -27268,6 +27338,7 @@
                   <a:srgbClr val="8A6D1E"/>
                 </a:solidFill>
                 <a:latin typeface="Amiri" pitchFamily="2" charset="-78"/>
+                <a:ea typeface="Amiri" pitchFamily="2" charset="-78"/>
                 <a:cs typeface="Amiri" pitchFamily="2" charset="-78"/>
               </a:rPr>
               <a:t>آدَابُ الصَّفِّ</a:t>
@@ -28799,6 +28870,7 @@
                   <a:srgbClr val="D4AF37"/>
                 </a:solidFill>
                 <a:latin typeface="Amiri" pitchFamily="2" charset="-78"/>
+                <a:ea typeface="Amiri" pitchFamily="2" charset="-78"/>
                 <a:cs typeface="Amiri" pitchFamily="2" charset="-78"/>
               </a:rPr>
               <a:t>م</a:t>
@@ -29119,6 +29191,7 @@
                   <a:srgbClr val="8A6D1E"/>
                 </a:solidFill>
                 <a:latin typeface="Amiri" pitchFamily="2" charset="-78"/>
+                <a:ea typeface="Amiri" pitchFamily="2" charset="-78"/>
                 <a:cs typeface="Amiri" pitchFamily="2" charset="-78"/>
               </a:rPr>
               <a:t>الإِجَابَاتُ</a:t>
@@ -29660,6 +29733,7 @@
                   <a:srgbClr val="8A6D1E"/>
                 </a:solidFill>
                 <a:latin typeface="Amiri" pitchFamily="2" charset="-78"/>
+                <a:ea typeface="Amiri" pitchFamily="2" charset="-78"/>
                 <a:cs typeface="Amiri" pitchFamily="2" charset="-78"/>
               </a:rPr>
               <a:t>خَمْسًا وَعِشْرِينَ دَقِيقَةً</a:t>
@@ -30163,6 +30237,7 @@
                   <a:srgbClr val="8A6D1E"/>
                 </a:solidFill>
                 <a:latin typeface="Amiri" pitchFamily="2" charset="-78"/>
+                <a:ea typeface="Amiri" pitchFamily="2" charset="-78"/>
                 <a:cs typeface="Amiri" pitchFamily="2" charset="-78"/>
               </a:rPr>
               <a:t>المَوَاصَلَاتِ رَخِيصَةٌ</a:t>
@@ -30666,6 +30741,7 @@
                   <a:srgbClr val="8A6D1E"/>
                 </a:solidFill>
                 <a:latin typeface="Amiri" pitchFamily="2" charset="-78"/>
+                <a:ea typeface="Amiri" pitchFamily="2" charset="-78"/>
                 <a:cs typeface="Amiri" pitchFamily="2" charset="-78"/>
               </a:rPr>
               <a:t>الطُّرُقَ مُزْدَحِمَةٌ فِي الصَّبَاحِ</a:t>
@@ -31169,6 +31245,7 @@
                   <a:srgbClr val="8A6D1E"/>
                 </a:solidFill>
                 <a:latin typeface="Amiri" pitchFamily="2" charset="-78"/>
+                <a:ea typeface="Amiri" pitchFamily="2" charset="-78"/>
                 <a:cs typeface="Amiri" pitchFamily="2" charset="-78"/>
               </a:rPr>
               <a:t>بِصِفَةٍ عَامَّةٍ أُحِبُّ مَدِينَتِي</a:t>
@@ -31405,6 +31482,7 @@
                   <a:srgbClr val="9AA1AB"/>
                 </a:solidFill>
                 <a:latin typeface="Amiri" pitchFamily="2" charset="-78"/>
+                <a:ea typeface="Amiri" pitchFamily="2" charset="-78"/>
                 <a:cs typeface="Amiri" pitchFamily="2" charset="-78"/>
               </a:rPr>
               <a:t>لِأَنَّهَا سَاحِلِيَّةٌ</a:t>
@@ -31506,6 +31584,7 @@
                   <a:srgbClr val="9AA1AB"/>
                 </a:solidFill>
                 <a:latin typeface="Amiri" pitchFamily="2" charset="-78"/>
+                <a:ea typeface="Amiri" pitchFamily="2" charset="-78"/>
                 <a:cs typeface="Amiri" pitchFamily="2" charset="-78"/>
               </a:rPr>
               <a:t>لِأَنَّهَا مُزْدَحِمَةٌ</a:t>
@@ -31634,6 +31713,7 @@
                   <a:srgbClr val="1F2A37"/>
                 </a:solidFill>
                 <a:latin typeface="Amiri" pitchFamily="2" charset="-78"/>
+                <a:ea typeface="Amiri" pitchFamily="2" charset="-78"/>
                 <a:cs typeface="Amiri" pitchFamily="2" charset="-78"/>
               </a:rPr>
               <a:t>لِأَنَّهَا آمِنَةٌ</a:t>
@@ -31672,6 +31752,7 @@
                   <a:srgbClr val="8A6D1E"/>
                 </a:solidFill>
                 <a:latin typeface="Amiri" pitchFamily="2" charset="-78"/>
+                <a:ea typeface="Amiri" pitchFamily="2" charset="-78"/>
                 <a:cs typeface="Amiri" pitchFamily="2" charset="-78"/>
               </a:rPr>
               <a:t>آمِنَةٌ</a:t>
@@ -31818,6 +31899,7 @@
                   <a:srgbClr val="D4AF37"/>
                 </a:solidFill>
                 <a:latin typeface="Amiri" pitchFamily="2" charset="-78"/>
+                <a:ea typeface="Amiri" pitchFamily="2" charset="-78"/>
                 <a:cs typeface="Amiri" pitchFamily="2" charset="-78"/>
               </a:rPr>
               <a:t>م</a:t>
@@ -32138,6 +32220,7 @@
                   <a:srgbClr val="8A6D1E"/>
                 </a:solidFill>
                 <a:latin typeface="Amiri" pitchFamily="2" charset="-78"/>
+                <a:ea typeface="Amiri" pitchFamily="2" charset="-78"/>
                 <a:cs typeface="Amiri" pitchFamily="2" charset="-78"/>
               </a:rPr>
               <a:t>اِسْتِمَارَةُ النَّقْلِ</a:t>
@@ -32418,6 +32501,7 @@
                   <a:srgbClr val="1B3B6F"/>
                 </a:solidFill>
                 <a:latin typeface="Amiri" pitchFamily="2" charset="-78"/>
+                <a:ea typeface="Amiri" pitchFamily="2" charset="-78"/>
                 <a:cs typeface="Amiri" pitchFamily="2" charset="-78"/>
               </a:rPr>
               <a:t>اِسْمُ المَدِينَةِ</a:t>
@@ -32624,6 +32708,7 @@
                   <a:srgbClr val="1B3B6F"/>
                 </a:solidFill>
                 <a:latin typeface="Amiri" pitchFamily="2" charset="-78"/>
+                <a:ea typeface="Amiri" pitchFamily="2" charset="-78"/>
                 <a:cs typeface="Amiri" pitchFamily="2" charset="-78"/>
               </a:rPr>
               <a:t>وَسِيلَةُ النَّقْلِ الرَّئِيسِيَّةُ</a:t>
@@ -32830,6 +32915,7 @@
                   <a:srgbClr val="1B3B6F"/>
                 </a:solidFill>
                 <a:latin typeface="Amiri" pitchFamily="2" charset="-78"/>
+                <a:ea typeface="Amiri" pitchFamily="2" charset="-78"/>
                 <a:cs typeface="Amiri" pitchFamily="2" charset="-78"/>
               </a:rPr>
               <a:t>المَسَافَةُ إِلَى المَدْرَسَةِ</a:t>
@@ -33036,6 +33122,7 @@
                   <a:srgbClr val="1B3B6F"/>
                 </a:solidFill>
                 <a:latin typeface="Amiri" pitchFamily="2" charset="-78"/>
+                <a:ea typeface="Amiri" pitchFamily="2" charset="-78"/>
                 <a:cs typeface="Amiri" pitchFamily="2" charset="-78"/>
               </a:rPr>
               <a:t>مِيزَةٌ وَاحِدَةٌ</a:t>
@@ -33242,6 +33329,7 @@
                   <a:srgbClr val="1B3B6F"/>
                 </a:solidFill>
                 <a:latin typeface="Amiri" pitchFamily="2" charset="-78"/>
+                <a:ea typeface="Amiri" pitchFamily="2" charset="-78"/>
                 <a:cs typeface="Amiri" pitchFamily="2" charset="-78"/>
               </a:rPr>
               <a:t>عَيْبٌ وَاحِدٌ</a:t>
@@ -33396,6 +33484,7 @@
                   <a:srgbClr val="1B3B6F"/>
                 </a:solidFill>
                 <a:latin typeface="Amiri" pitchFamily="2" charset="-78"/>
+                <a:ea typeface="Amiri" pitchFamily="2" charset="-78"/>
                 <a:cs typeface="Amiri" pitchFamily="2" charset="-78"/>
               </a:rPr>
               <a:t>لَنْدَنُ</a:t>
@@ -33422,6 +33511,7 @@
                   <a:srgbClr val="1B3B6F"/>
                 </a:solidFill>
                 <a:latin typeface="Amiri" pitchFamily="2" charset="-78"/>
+                <a:ea typeface="Amiri" pitchFamily="2" charset="-78"/>
                 <a:cs typeface="Amiri" pitchFamily="2" charset="-78"/>
               </a:rPr>
               <a:t>الحَافِلَةُ</a:t>
@@ -33448,6 +33538,7 @@
                   <a:srgbClr val="1B3B6F"/>
                 </a:solidFill>
                 <a:latin typeface="Amiri" pitchFamily="2" charset="-78"/>
+                <a:ea typeface="Amiri" pitchFamily="2" charset="-78"/>
                 <a:cs typeface="Amiri" pitchFamily="2" charset="-78"/>
               </a:rPr>
               <a:t>خَمْسَةُ كِيلُومِتْرَاتٍ</a:t>
@@ -33474,6 +33565,7 @@
                   <a:srgbClr val="1B3B6F"/>
                 </a:solidFill>
                 <a:latin typeface="Amiri" pitchFamily="2" charset="-78"/>
+                <a:ea typeface="Amiri" pitchFamily="2" charset="-78"/>
                 <a:cs typeface="Amiri" pitchFamily="2" charset="-78"/>
               </a:rPr>
               <a:t>المَوَاصَلَاتُ رَخِيصَةٌ</a:t>
@@ -33500,6 +33592,7 @@
                   <a:srgbClr val="1B3B6F"/>
                 </a:solidFill>
                 <a:latin typeface="Amiri" pitchFamily="2" charset="-78"/>
+                <a:ea typeface="Amiri" pitchFamily="2" charset="-78"/>
                 <a:cs typeface="Amiri" pitchFamily="2" charset="-78"/>
               </a:rPr>
               <a:t>الشَّوَارِعُ مُكْتَظَّةٌ</a:t>
@@ -33633,6 +33726,7 @@
                   <a:srgbClr val="D4AF37"/>
                 </a:solidFill>
                 <a:latin typeface="Amiri" pitchFamily="2" charset="-78"/>
+                <a:ea typeface="Amiri" pitchFamily="2" charset="-78"/>
                 <a:cs typeface="Amiri" pitchFamily="2" charset="-78"/>
               </a:rPr>
               <a:t>م</a:t>
@@ -33953,6 +34047,7 @@
                   <a:srgbClr val="8A6D1E"/>
                 </a:solidFill>
                 <a:latin typeface="Amiri" pitchFamily="2" charset="-78"/>
+                <a:ea typeface="Amiri" pitchFamily="2" charset="-78"/>
                 <a:cs typeface="Amiri" pitchFamily="2" charset="-78"/>
               </a:rPr>
               <a:t>الكِتَابَةُ</a:t>
@@ -34870,6 +34965,7 @@
                   <a:srgbClr val="D4AF37"/>
                 </a:solidFill>
                 <a:latin typeface="Amiri" pitchFamily="2" charset="-78"/>
+                <a:ea typeface="Amiri" pitchFamily="2" charset="-78"/>
                 <a:cs typeface="Amiri" pitchFamily="2" charset="-78"/>
               </a:rPr>
               <a:t>م</a:t>
@@ -35190,6 +35286,7 @@
                   <a:srgbClr val="8A6D1E"/>
                 </a:solidFill>
                 <a:latin typeface="Amiri" pitchFamily="2" charset="-78"/>
+                <a:ea typeface="Amiri" pitchFamily="2" charset="-78"/>
                 <a:cs typeface="Amiri" pitchFamily="2" charset="-78"/>
               </a:rPr>
               <a:t>التَّحَدُّثُ</a:t>
@@ -36091,6 +36188,7 @@
                   <a:srgbClr val="D4AF37"/>
                 </a:solidFill>
                 <a:latin typeface="Amiri" pitchFamily="2" charset="-78"/>
+                <a:ea typeface="Amiri" pitchFamily="2" charset="-78"/>
                 <a:cs typeface="Amiri" pitchFamily="2" charset="-78"/>
               </a:rPr>
               <a:t>م</a:t>
@@ -36411,6 +36509,7 @@
                   <a:srgbClr val="8A6D1E"/>
                 </a:solidFill>
                 <a:latin typeface="Amiri" pitchFamily="2" charset="-78"/>
+                <a:ea typeface="Amiri" pitchFamily="2" charset="-78"/>
                 <a:cs typeface="Amiri" pitchFamily="2" charset="-78"/>
               </a:rPr>
               <a:t>مِلَفُّ المَهَارَاتِ</a:t>
@@ -37583,6 +37682,7 @@
                   <a:srgbClr val="D4AF37"/>
                 </a:solidFill>
                 <a:latin typeface="Amiri" pitchFamily="2" charset="-78"/>
+                <a:ea typeface="Amiri" pitchFamily="2" charset="-78"/>
                 <a:cs typeface="Amiri" pitchFamily="2" charset="-78"/>
               </a:rPr>
               <a:t>م</a:t>
@@ -37903,6 +38003,7 @@
                   <a:srgbClr val="8A6D1E"/>
                 </a:solidFill>
                 <a:latin typeface="Amiri" pitchFamily="2" charset="-78"/>
+                <a:ea typeface="Amiri" pitchFamily="2" charset="-78"/>
                 <a:cs typeface="Amiri" pitchFamily="2" charset="-78"/>
               </a:rPr>
               <a:t>قَيِّمْ عَمَلَكَ</a:t>
@@ -39060,6 +39161,7 @@
                   <a:srgbClr val="D4AF37"/>
                 </a:solidFill>
                 <a:latin typeface="Amiri" pitchFamily="2" charset="-78"/>
+                <a:ea typeface="Amiri" pitchFamily="2" charset="-78"/>
                 <a:cs typeface="Amiri" pitchFamily="2" charset="-78"/>
               </a:rPr>
               <a:t>م</a:t>
@@ -39380,6 +39482,7 @@
                   <a:srgbClr val="8A6D1E"/>
                 </a:solidFill>
                 <a:latin typeface="Amiri" pitchFamily="2" charset="-78"/>
+                <a:ea typeface="Amiri" pitchFamily="2" charset="-78"/>
                 <a:cs typeface="Amiri" pitchFamily="2" charset="-78"/>
               </a:rPr>
               <a:t>التَّحْضِيرُ لِلدَّرْسِ القَادِمِ</a:t>
@@ -39593,6 +39696,7 @@
                   <a:srgbClr val="1B3B6F"/>
                 </a:solidFill>
                 <a:latin typeface="Amiri" pitchFamily="2" charset="-78"/>
+                <a:ea typeface="Amiri" pitchFamily="2" charset="-78"/>
                 <a:cs typeface="Amiri" pitchFamily="2" charset="-78"/>
               </a:rPr>
               <a:t>أَسْتَيْقِظُ</a:t>
@@ -39639,11 +39743,12 @@
               <a:buNone/>
             </a:pPr>
             <a:r>
-              <a:rPr lang="en-US" sz="1000" i="1" dirty="0">
+              <a:rPr lang="ar-SA" sz="1000" i="1" dirty="0">
                 <a:solidFill>
                   <a:srgbClr val="5A6472"/>
                 </a:solidFill>
                 <a:latin typeface="Calibri" pitchFamily="34" charset="0"/>
+                <a:ea typeface="Amiri" pitchFamily="2" charset="-78"/>
                 <a:cs typeface="Amiri" pitchFamily="2" charset="-78"/>
               </a:rPr>
               <a:t>  تَسْتَيْقِظُ she</a:t>
@@ -39682,6 +39787,7 @@
                   <a:srgbClr val="1B3B6F"/>
                 </a:solidFill>
                 <a:latin typeface="Amiri" pitchFamily="2" charset="-78"/>
+                <a:ea typeface="Amiri" pitchFamily="2" charset="-78"/>
                 <a:cs typeface="Amiri" pitchFamily="2" charset="-78"/>
               </a:rPr>
               <a:t>أَغْسِلُ وَجْهِي</a:t>
@@ -39728,11 +39834,12 @@
               <a:buNone/>
             </a:pPr>
             <a:r>
-              <a:rPr lang="en-US" sz="1000" i="1" dirty="0">
+              <a:rPr lang="ar-SA" sz="1000" i="1" dirty="0">
                 <a:solidFill>
                   <a:srgbClr val="5A6472"/>
                 </a:solidFill>
                 <a:latin typeface="Calibri" pitchFamily="34" charset="0"/>
+                <a:ea typeface="Amiri" pitchFamily="2" charset="-78"/>
                 <a:cs typeface="Amiri" pitchFamily="2" charset="-78"/>
               </a:rPr>
               <a:t>  تَغْسِلُ she</a:t>
@@ -39771,6 +39878,7 @@
                   <a:srgbClr val="1B3B6F"/>
                 </a:solidFill>
                 <a:latin typeface="Amiri" pitchFamily="2" charset="-78"/>
+                <a:ea typeface="Amiri" pitchFamily="2" charset="-78"/>
                 <a:cs typeface="Amiri" pitchFamily="2" charset="-78"/>
               </a:rPr>
               <a:t>أَتَنَاوَلُ الفُطُورَ</a:t>
@@ -39817,11 +39925,12 @@
               <a:buNone/>
             </a:pPr>
             <a:r>
-              <a:rPr lang="en-US" sz="1000" i="1" dirty="0">
+              <a:rPr lang="ar-SA" sz="1000" i="1" dirty="0">
                 <a:solidFill>
                   <a:srgbClr val="5A6472"/>
                 </a:solidFill>
                 <a:latin typeface="Calibri" pitchFamily="34" charset="0"/>
+                <a:ea typeface="Amiri" pitchFamily="2" charset="-78"/>
                 <a:cs typeface="Amiri" pitchFamily="2" charset="-78"/>
               </a:rPr>
               <a:t>  نَتَنَاوَلُ we</a:t>
@@ -39860,6 +39969,7 @@
                   <a:srgbClr val="1B3B6F"/>
                 </a:solidFill>
                 <a:latin typeface="Amiri" pitchFamily="2" charset="-78"/>
+                <a:ea typeface="Amiri" pitchFamily="2" charset="-78"/>
                 <a:cs typeface="Amiri" pitchFamily="2" charset="-78"/>
               </a:rPr>
               <a:t>أَلْبَسُ</a:t>
@@ -39906,11 +40016,12 @@
               <a:buNone/>
             </a:pPr>
             <a:r>
-              <a:rPr lang="en-US" sz="1000" i="1" dirty="0">
+              <a:rPr lang="ar-SA" sz="1000" i="1" dirty="0">
                 <a:solidFill>
                   <a:srgbClr val="5A6472"/>
                 </a:solidFill>
                 <a:latin typeface="Calibri" pitchFamily="34" charset="0"/>
+                <a:ea typeface="Amiri" pitchFamily="2" charset="-78"/>
                 <a:cs typeface="Amiri" pitchFamily="2" charset="-78"/>
               </a:rPr>
               <a:t>  تَلْبَسُ she</a:t>
@@ -39949,6 +40060,7 @@
                   <a:srgbClr val="1B3B6F"/>
                 </a:solidFill>
                 <a:latin typeface="Amiri" pitchFamily="2" charset="-78"/>
+                <a:ea typeface="Amiri" pitchFamily="2" charset="-78"/>
                 <a:cs typeface="Amiri" pitchFamily="2" charset="-78"/>
               </a:rPr>
               <a:t>أَخْرُجُ مِنَ البَيْتِ</a:t>
@@ -39995,11 +40107,12 @@
               <a:buNone/>
             </a:pPr>
             <a:r>
-              <a:rPr lang="en-US" sz="1000" i="1" dirty="0">
+              <a:rPr lang="ar-SA" sz="1000" i="1" dirty="0">
                 <a:solidFill>
                   <a:srgbClr val="5A6472"/>
                 </a:solidFill>
                 <a:latin typeface="Calibri" pitchFamily="34" charset="0"/>
+                <a:ea typeface="Amiri" pitchFamily="2" charset="-78"/>
                 <a:cs typeface="Amiri" pitchFamily="2" charset="-78"/>
               </a:rPr>
               <a:t>  يَخْرُجُ he</a:t>
@@ -40114,6 +40227,7 @@
                   <a:srgbClr val="1B3B6F"/>
                 </a:solidFill>
                 <a:latin typeface="Amiri" pitchFamily="2" charset="-78"/>
+                <a:ea typeface="Amiri" pitchFamily="2" charset="-78"/>
                 <a:cs typeface="Amiri" pitchFamily="2" charset="-78"/>
               </a:rPr>
               <a:t>فِي الصَّبَاحِ، أَوَّلًا …</a:t>
@@ -40576,6 +40690,7 @@
                   <a:srgbClr val="1F2A37"/>
                 </a:solidFill>
                 <a:latin typeface="Amiri" pitchFamily="2" charset="-78"/>
+                <a:ea typeface="Amiri" pitchFamily="2" charset="-78"/>
                 <a:cs typeface="Amiri" pitchFamily="2" charset="-78"/>
               </a:rPr>
               <a:t>ثُمَّ</a:t>
@@ -40602,6 +40717,7 @@
                   <a:srgbClr val="1F2A37"/>
                 </a:solidFill>
                 <a:latin typeface="Amiri" pitchFamily="2" charset="-78"/>
+                <a:ea typeface="Amiri" pitchFamily="2" charset="-78"/>
                 <a:cs typeface="Amiri" pitchFamily="2" charset="-78"/>
               </a:rPr>
               <a:t>بَعْدَ ذٰلِكَ</a:t>
@@ -40835,6 +40951,7 @@
                   <a:srgbClr val="FFFFFF"/>
                 </a:solidFill>
                 <a:latin typeface="Amiri" pitchFamily="2" charset="-78"/>
+                <a:ea typeface="Amiri" pitchFamily="2" charset="-78"/>
                 <a:cs typeface="Amiri" pitchFamily="2" charset="-78"/>
               </a:rPr>
               <a:t>أَحْسَنْتُمْ! إِلَى اللِّقَاءِ</a:t>
@@ -40987,6 +41104,7 @@
                   <a:srgbClr val="D4AF37"/>
                 </a:solidFill>
                 <a:latin typeface="Amiri" pitchFamily="2" charset="-78"/>
+                <a:ea typeface="Amiri" pitchFamily="2" charset="-78"/>
                 <a:cs typeface="Amiri" pitchFamily="2" charset="-78"/>
               </a:rPr>
               <a:t>رُوتِينِي الصَّبَاحِيُّ</a:t>
@@ -41120,6 +41238,7 @@
                   <a:srgbClr val="D4AF37"/>
                 </a:solidFill>
                 <a:latin typeface="Amiri" pitchFamily="2" charset="-78"/>
+                <a:ea typeface="Amiri" pitchFamily="2" charset="-78"/>
                 <a:cs typeface="Amiri" pitchFamily="2" charset="-78"/>
               </a:rPr>
               <a:t>م</a:t>
@@ -41440,6 +41559,7 @@
                   <a:srgbClr val="8A6D1E"/>
                 </a:solidFill>
                 <a:latin typeface="Amiri" pitchFamily="2" charset="-78"/>
+                <a:ea typeface="Amiri" pitchFamily="2" charset="-78"/>
                 <a:cs typeface="Amiri" pitchFamily="2" charset="-78"/>
               </a:rPr>
               <a:t>خَرِيطَةُ الدَّرْسِ</a:t>
@@ -41754,6 +41874,7 @@
                   <a:srgbClr val="0E7C86"/>
                 </a:solidFill>
                 <a:latin typeface="Amiri" pitchFamily="2" charset="-78"/>
+                <a:ea typeface="Amiri" pitchFamily="2" charset="-78"/>
                 <a:cs typeface="Amiri" pitchFamily="2" charset="-78"/>
               </a:rPr>
               <a:t>تَهْيِئَةٌ</a:t>
@@ -42030,6 +42151,7 @@
                   <a:srgbClr val="1B3B6F"/>
                 </a:solidFill>
                 <a:latin typeface="Amiri" pitchFamily="2" charset="-78"/>
+                <a:ea typeface="Amiri" pitchFamily="2" charset="-78"/>
                 <a:cs typeface="Amiri" pitchFamily="2" charset="-78"/>
               </a:rPr>
               <a:t>خُطَّةُ التَّقْيِيمِ</a:t>
@@ -42306,6 +42428,7 @@
                   <a:srgbClr val="6B4C9A"/>
                 </a:solidFill>
                 <a:latin typeface="Amiri" pitchFamily="2" charset="-78"/>
+                <a:ea typeface="Amiri" pitchFamily="2" charset="-78"/>
                 <a:cs typeface="Amiri" pitchFamily="2" charset="-78"/>
               </a:rPr>
               <a:t>الاِسْتِمَاعُ</a:t>
@@ -42582,6 +42705,7 @@
                   <a:srgbClr val="2F6FB0"/>
                 </a:solidFill>
                 <a:latin typeface="Amiri" pitchFamily="2" charset="-78"/>
+                <a:ea typeface="Amiri" pitchFamily="2" charset="-78"/>
                 <a:cs typeface="Amiri" pitchFamily="2" charset="-78"/>
               </a:rPr>
               <a:t>القِرَاءَةُ</a:t>
@@ -42858,6 +42982,7 @@
                   <a:srgbClr val="1E6B52"/>
                 </a:solidFill>
                 <a:latin typeface="Amiri" pitchFamily="2" charset="-78"/>
+                <a:ea typeface="Amiri" pitchFamily="2" charset="-78"/>
                 <a:cs typeface="Amiri" pitchFamily="2" charset="-78"/>
               </a:rPr>
               <a:t>الكِتَابَةُ وَالتَّحَدُّثُ</a:t>
@@ -43134,6 +43259,7 @@
                   <a:srgbClr val="8A6D1E"/>
                 </a:solidFill>
                 <a:latin typeface="Amiri" pitchFamily="2" charset="-78"/>
+                <a:ea typeface="Amiri" pitchFamily="2" charset="-78"/>
                 <a:cs typeface="Amiri" pitchFamily="2" charset="-78"/>
               </a:rPr>
               <a:t>الهَدَفُ</a:t>
@@ -43410,6 +43536,7 @@
                   <a:srgbClr val="C45A3C"/>
                 </a:solidFill>
                 <a:latin typeface="Amiri" pitchFamily="2" charset="-78"/>
+                <a:ea typeface="Amiri" pitchFamily="2" charset="-78"/>
                 <a:cs typeface="Amiri" pitchFamily="2" charset="-78"/>
               </a:rPr>
               <a:t>اِسْتَعِدَّ</a:t>
@@ -43653,6 +43780,7 @@
                   <a:srgbClr val="D4AF37"/>
                 </a:solidFill>
                 <a:latin typeface="Amiri" pitchFamily="2" charset="-78"/>
+                <a:ea typeface="Amiri" pitchFamily="2" charset="-78"/>
                 <a:cs typeface="Amiri" pitchFamily="2" charset="-78"/>
               </a:rPr>
               <a:t>م</a:t>
@@ -43973,6 +44101,7 @@
                   <a:srgbClr val="8A6D1E"/>
                 </a:solidFill>
                 <a:latin typeface="Amiri" pitchFamily="2" charset="-78"/>
+                <a:ea typeface="Amiri" pitchFamily="2" charset="-78"/>
                 <a:cs typeface="Amiri" pitchFamily="2" charset="-78"/>
               </a:rPr>
               <a:t>اِبْدَأِ الآنَ</a:t>
@@ -44159,6 +44288,7 @@
                   <a:srgbClr val="1B3B6F"/>
                 </a:solidFill>
                 <a:latin typeface="Amiri" pitchFamily="2" charset="-78"/>
+                <a:ea typeface="Amiri" pitchFamily="2" charset="-78"/>
                 <a:cs typeface="Amiri" pitchFamily="2" charset="-78"/>
               </a:rPr>
               <a:t>تَقْيِيمٌ</a:t>
@@ -44623,6 +44753,7 @@
                   <a:srgbClr val="1B3B6F"/>
                 </a:solidFill>
                 <a:latin typeface="Amiri" pitchFamily="2" charset="-78"/>
+                <a:ea typeface="Amiri" pitchFamily="2" charset="-78"/>
                 <a:cs typeface="Amiri" pitchFamily="2" charset="-78"/>
               </a:rPr>
               <a:t>مَحَطَّةٌ قَرِيبَةٌ</a:t>
@@ -44737,6 +44868,7 @@
                   <a:srgbClr val="1F2A37"/>
                 </a:solidFill>
                 <a:latin typeface="Amiri" pitchFamily="2" charset="-78"/>
+                <a:ea typeface="Amiri" pitchFamily="2" charset="-78"/>
                 <a:cs typeface="Amiri" pitchFamily="2" charset="-78"/>
               </a:rPr>
               <a:t>تُوجَدُ</a:t>
@@ -44838,6 +44970,7 @@
                   <a:srgbClr val="1F2A37"/>
                 </a:solidFill>
                 <a:latin typeface="Amiri" pitchFamily="2" charset="-78"/>
+                <a:ea typeface="Amiri" pitchFamily="2" charset="-78"/>
                 <a:cs typeface="Amiri" pitchFamily="2" charset="-78"/>
               </a:rPr>
               <a:t>يُوجَدُ</a:t>
@@ -44939,6 +45072,7 @@
                   <a:srgbClr val="1F2A37"/>
                 </a:solidFill>
                 <a:latin typeface="Amiri" pitchFamily="2" charset="-78"/>
+                <a:ea typeface="Amiri" pitchFamily="2" charset="-78"/>
                 <a:cs typeface="Amiri" pitchFamily="2" charset="-78"/>
               </a:rPr>
               <a:t>هٰذَا</a:t>
@@ -45175,6 +45309,7 @@
                   <a:srgbClr val="1F2A37"/>
                 </a:solidFill>
                 <a:latin typeface="Amiri" pitchFamily="2" charset="-78"/>
+                <a:ea typeface="Amiri" pitchFamily="2" charset="-78"/>
                 <a:cs typeface="Amiri" pitchFamily="2" charset="-78"/>
               </a:rPr>
               <a:t>عَلَى القِطَارِ</a:t>
@@ -45276,6 +45411,7 @@
                   <a:srgbClr val="1F2A37"/>
                 </a:solidFill>
                 <a:latin typeface="Amiri" pitchFamily="2" charset="-78"/>
+                <a:ea typeface="Amiri" pitchFamily="2" charset="-78"/>
                 <a:cs typeface="Amiri" pitchFamily="2" charset="-78"/>
               </a:rPr>
               <a:t>مَشْيًا القِطَارَ</a:t>
@@ -45377,6 +45513,7 @@
                   <a:srgbClr val="1F2A37"/>
                 </a:solidFill>
                 <a:latin typeface="Amiri" pitchFamily="2" charset="-78"/>
+                <a:ea typeface="Amiri" pitchFamily="2" charset="-78"/>
                 <a:cs typeface="Amiri" pitchFamily="2" charset="-78"/>
               </a:rPr>
               <a:t>بِالقِطَارِ</a:t>
@@ -45613,6 +45750,7 @@
                   <a:srgbClr val="1F2A37"/>
                 </a:solidFill>
                 <a:latin typeface="Amiri" pitchFamily="2" charset="-78"/>
+                <a:ea typeface="Amiri" pitchFamily="2" charset="-78"/>
                 <a:cs typeface="Amiri" pitchFamily="2" charset="-78"/>
               </a:rPr>
               <a:t>اِذْهَبِي مُسْتَقِيمًا.</a:t>
@@ -45714,6 +45852,7 @@
                   <a:srgbClr val="1F2A37"/>
                 </a:solidFill>
                 <a:latin typeface="Amiri" pitchFamily="2" charset="-78"/>
+                <a:ea typeface="Amiri" pitchFamily="2" charset="-78"/>
                 <a:cs typeface="Amiri" pitchFamily="2" charset="-78"/>
               </a:rPr>
               <a:t>اِذْهَبْ مُسْتَقِيمًا.</a:t>
@@ -45815,6 +45954,7 @@
                   <a:srgbClr val="1F2A37"/>
                 </a:solidFill>
                 <a:latin typeface="Amiri" pitchFamily="2" charset="-78"/>
+                <a:ea typeface="Amiri" pitchFamily="2" charset="-78"/>
                 <a:cs typeface="Amiri" pitchFamily="2" charset="-78"/>
               </a:rPr>
               <a:t>اِذْهَبُوا مُسْتَقِيمًا.</a:t>
@@ -46051,6 +46191,7 @@
                   <a:srgbClr val="1F2A37"/>
                 </a:solidFill>
                 <a:latin typeface="Amiri" pitchFamily="2" charset="-78"/>
+                <a:ea typeface="Amiri" pitchFamily="2" charset="-78"/>
                 <a:cs typeface="Amiri" pitchFamily="2" charset="-78"/>
               </a:rPr>
               <a:t>أَيْنَ أَقْرَبُ مَحَطَّةٍ؟</a:t>
@@ -46152,6 +46293,7 @@
                   <a:srgbClr val="1F2A37"/>
                 </a:solidFill>
                 <a:latin typeface="Amiri" pitchFamily="2" charset="-78"/>
+                <a:ea typeface="Amiri" pitchFamily="2" charset="-78"/>
                 <a:cs typeface="Amiri" pitchFamily="2" charset="-78"/>
               </a:rPr>
               <a:t>كَمْ مَحَطَّةٌ؟</a:t>
@@ -46253,6 +46395,7 @@
                   <a:srgbClr val="1F2A37"/>
                 </a:solidFill>
                 <a:latin typeface="Amiri" pitchFamily="2" charset="-78"/>
+                <a:ea typeface="Amiri" pitchFamily="2" charset="-78"/>
                 <a:cs typeface="Amiri" pitchFamily="2" charset="-78"/>
               </a:rPr>
               <a:t>مَاذَا المَحَطَّةُ؟</a:t>
@@ -46588,6 +46731,7 @@
                   <a:srgbClr val="D4AF37"/>
                 </a:solidFill>
                 <a:latin typeface="Amiri" pitchFamily="2" charset="-78"/>
+                <a:ea typeface="Amiri" pitchFamily="2" charset="-78"/>
                 <a:cs typeface="Amiri" pitchFamily="2" charset="-78"/>
               </a:rPr>
               <a:t>م</a:t>
@@ -46908,6 +47052,7 @@
                   <a:srgbClr val="8A6D1E"/>
                 </a:solidFill>
                 <a:latin typeface="Amiri" pitchFamily="2" charset="-78"/>
+                <a:ea typeface="Amiri" pitchFamily="2" charset="-78"/>
                 <a:cs typeface="Amiri" pitchFamily="2" charset="-78"/>
               </a:rPr>
               <a:t>الإِجَابَاتُ وَالتَّعْلِيلُ</a:t>
@@ -47094,6 +47239,7 @@
                   <a:srgbClr val="1B3B6F"/>
                 </a:solidFill>
                 <a:latin typeface="Amiri" pitchFamily="2" charset="-78"/>
+                <a:ea typeface="Amiri" pitchFamily="2" charset="-78"/>
                 <a:cs typeface="Amiri" pitchFamily="2" charset="-78"/>
               </a:rPr>
               <a:t>تَقْيِيمٌ</a:t>
@@ -47623,6 +47769,7 @@
                   <a:srgbClr val="1B3B6F"/>
                 </a:solidFill>
                 <a:latin typeface="Amiri" pitchFamily="2" charset="-78"/>
+                <a:ea typeface="Amiri" pitchFamily="2" charset="-78"/>
                 <a:cs typeface="Amiri" pitchFamily="2" charset="-78"/>
               </a:rPr>
               <a:t>مَحَطَّةٌ قَرِيبَةٌ</a:t>
@@ -47764,6 +47911,7 @@
                   <a:srgbClr val="1F2A37"/>
                 </a:solidFill>
                 <a:latin typeface="Amiri" pitchFamily="2" charset="-78"/>
+                <a:ea typeface="Amiri" pitchFamily="2" charset="-78"/>
                 <a:cs typeface="Amiri" pitchFamily="2" charset="-78"/>
               </a:rPr>
               <a:t>تُوجَدُ</a:t>
@@ -47865,6 +48013,7 @@
                   <a:srgbClr val="9AA1AB"/>
                 </a:solidFill>
                 <a:latin typeface="Amiri" pitchFamily="2" charset="-78"/>
+                <a:ea typeface="Amiri" pitchFamily="2" charset="-78"/>
                 <a:cs typeface="Amiri" pitchFamily="2" charset="-78"/>
               </a:rPr>
               <a:t>يُوجَدُ</a:t>
@@ -47966,6 +48115,7 @@
                   <a:srgbClr val="9AA1AB"/>
                 </a:solidFill>
                 <a:latin typeface="Amiri" pitchFamily="2" charset="-78"/>
+                <a:ea typeface="Amiri" pitchFamily="2" charset="-78"/>
                 <a:cs typeface="Amiri" pitchFamily="2" charset="-78"/>
               </a:rPr>
               <a:t>هٰذَا</a:t>
@@ -48240,6 +48390,7 @@
                   <a:srgbClr val="9AA1AB"/>
                 </a:solidFill>
                 <a:latin typeface="Amiri" pitchFamily="2" charset="-78"/>
+                <a:ea typeface="Amiri" pitchFamily="2" charset="-78"/>
                 <a:cs typeface="Amiri" pitchFamily="2" charset="-78"/>
               </a:rPr>
               <a:t>عَلَى القِطَارِ</a:t>
@@ -48341,6 +48492,7 @@
                   <a:srgbClr val="9AA1AB"/>
                 </a:solidFill>
                 <a:latin typeface="Amiri" pitchFamily="2" charset="-78"/>
+                <a:ea typeface="Amiri" pitchFamily="2" charset="-78"/>
                 <a:cs typeface="Amiri" pitchFamily="2" charset="-78"/>
               </a:rPr>
               <a:t>مَشْيًا القِطَارَ</a:t>
@@ -48469,6 +48621,7 @@
                   <a:srgbClr val="1F2A37"/>
                 </a:solidFill>
                 <a:latin typeface="Amiri" pitchFamily="2" charset="-78"/>
+                <a:ea typeface="Amiri" pitchFamily="2" charset="-78"/>
                 <a:cs typeface="Amiri" pitchFamily="2" charset="-78"/>
               </a:rPr>
               <a:t>بِالقِطَارِ</a:t>
@@ -48743,6 +48896,7 @@
                   <a:srgbClr val="9AA1AB"/>
                 </a:solidFill>
                 <a:latin typeface="Amiri" pitchFamily="2" charset="-78"/>
+                <a:ea typeface="Amiri" pitchFamily="2" charset="-78"/>
                 <a:cs typeface="Amiri" pitchFamily="2" charset="-78"/>
               </a:rPr>
               <a:t>اِذْهَبِي مُسْتَقِيمًا.</a:t>
@@ -48844,6 +48998,7 @@
                   <a:srgbClr val="9AA1AB"/>
                 </a:solidFill>
                 <a:latin typeface="Amiri" pitchFamily="2" charset="-78"/>
+                <a:ea typeface="Amiri" pitchFamily="2" charset="-78"/>
                 <a:cs typeface="Amiri" pitchFamily="2" charset="-78"/>
               </a:rPr>
               <a:t>اِذْهَبْ مُسْتَقِيمًا.</a:t>
@@ -48972,6 +49127,7 @@
                   <a:srgbClr val="1F2A37"/>
                 </a:solidFill>
                 <a:latin typeface="Amiri" pitchFamily="2" charset="-78"/>
+                <a:ea typeface="Amiri" pitchFamily="2" charset="-78"/>
                 <a:cs typeface="Amiri" pitchFamily="2" charset="-78"/>
               </a:rPr>
               <a:t>اِذْهَبُوا مُسْتَقِيمًا.</a:t>
@@ -49273,6 +49429,7 @@
                   <a:srgbClr val="1F2A37"/>
                 </a:solidFill>
                 <a:latin typeface="Amiri" pitchFamily="2" charset="-78"/>
+                <a:ea typeface="Amiri" pitchFamily="2" charset="-78"/>
                 <a:cs typeface="Amiri" pitchFamily="2" charset="-78"/>
               </a:rPr>
               <a:t>أَيْنَ أَقْرَبُ مَحَطَّةٍ؟</a:t>
@@ -49374,6 +49531,7 @@
                   <a:srgbClr val="9AA1AB"/>
                 </a:solidFill>
                 <a:latin typeface="Amiri" pitchFamily="2" charset="-78"/>
+                <a:ea typeface="Amiri" pitchFamily="2" charset="-78"/>
                 <a:cs typeface="Amiri" pitchFamily="2" charset="-78"/>
               </a:rPr>
               <a:t>كَمْ مَحَطَّةٌ؟</a:t>
@@ -49475,6 +49633,7 @@
                   <a:srgbClr val="9AA1AB"/>
                 </a:solidFill>
                 <a:latin typeface="Amiri" pitchFamily="2" charset="-78"/>
+                <a:ea typeface="Amiri" pitchFamily="2" charset="-78"/>
                 <a:cs typeface="Amiri" pitchFamily="2" charset="-78"/>
               </a:rPr>
               <a:t>مَاذَا المَحَطَّةُ؟</a:t>
@@ -49661,6 +49820,7 @@
                   <a:srgbClr val="1B3B6F"/>
                 </a:solidFill>
                 <a:latin typeface="Amiri" pitchFamily="2" charset="-78"/>
+                <a:ea typeface="Amiri" pitchFamily="2" charset="-78"/>
                 <a:cs typeface="Amiri" pitchFamily="2" charset="-78"/>
               </a:rPr>
               <a:t>اِقْرَأْ · اِبْحَثْ عَنِ الدَّلِيلِ · أَجِبْ</a:t>
@@ -49794,6 +49954,7 @@
                   <a:srgbClr val="D4AF37"/>
                 </a:solidFill>
                 <a:latin typeface="Amiri" pitchFamily="2" charset="-78"/>
+                <a:ea typeface="Amiri" pitchFamily="2" charset="-78"/>
                 <a:cs typeface="Amiri" pitchFamily="2" charset="-78"/>
               </a:rPr>
               <a:t>م</a:t>
@@ -50114,6 +50275,7 @@
                   <a:srgbClr val="8A6D1E"/>
                 </a:solidFill>
                 <a:latin typeface="Amiri" pitchFamily="2" charset="-78"/>
+                <a:ea typeface="Amiri" pitchFamily="2" charset="-78"/>
                 <a:cs typeface="Amiri" pitchFamily="2" charset="-78"/>
               </a:rPr>
               <a:t>مُرَاجَعَةُ القَوَاعِدِ</a:t>
@@ -50289,6 +50451,7 @@
                   <a:srgbClr val="8A6D1E"/>
                 </a:solidFill>
                 <a:latin typeface="Amiri" pitchFamily="2" charset="-78"/>
+                <a:ea typeface="Amiri" pitchFamily="2" charset="-78"/>
                 <a:cs typeface="Amiri" pitchFamily="2" charset="-78"/>
               </a:rPr>
               <a:t>يُوجَدُ · تُوجَدُ</a:t>
@@ -50327,6 +50490,7 @@
                   <a:srgbClr val="1B3B6F"/>
                 </a:solidFill>
                 <a:latin typeface="Amiri" pitchFamily="2" charset="-78"/>
+                <a:ea typeface="Amiri" pitchFamily="2" charset="-78"/>
                 <a:cs typeface="Amiri" pitchFamily="2" charset="-78"/>
               </a:rPr>
               <a:t>تُوجَدُ مَكْتَبَةٌ.</a:t>
@@ -50567,6 +50731,7 @@
                   <a:srgbClr val="8A6D1E"/>
                 </a:solidFill>
                 <a:latin typeface="Amiri" pitchFamily="2" charset="-78"/>
+                <a:ea typeface="Amiri" pitchFamily="2" charset="-78"/>
                 <a:cs typeface="Amiri" pitchFamily="2" charset="-78"/>
               </a:rPr>
               <a:t>بِـ · اِنْعَطِفُوا</a:t>
@@ -50605,6 +50770,7 @@
                   <a:srgbClr val="1B3B6F"/>
                 </a:solidFill>
                 <a:latin typeface="Amiri" pitchFamily="2" charset="-78"/>
+                <a:ea typeface="Amiri" pitchFamily="2" charset="-78"/>
                 <a:cs typeface="Amiri" pitchFamily="2" charset="-78"/>
               </a:rPr>
               <a:t>أَذْهَبُ بِالحَافِلَةِ.</a:t>
@@ -50845,6 +51011,7 @@
                   <a:srgbClr val="8A6D1E"/>
                 </a:solidFill>
                 <a:latin typeface="Amiri" pitchFamily="2" charset="-78"/>
+                <a:ea typeface="Amiri" pitchFamily="2" charset="-78"/>
                 <a:cs typeface="Amiri" pitchFamily="2" charset="-78"/>
               </a:rPr>
               <a:t>مَبْنِيَّةٌ · أَنَّ</a:t>
@@ -50883,6 +51050,7 @@
                   <a:srgbClr val="1B3B6F"/>
                 </a:solidFill>
                 <a:latin typeface="Amiri" pitchFamily="2" charset="-78"/>
+                <a:ea typeface="Amiri" pitchFamily="2" charset="-78"/>
                 <a:cs typeface="Amiri" pitchFamily="2" charset="-78"/>
               </a:rPr>
               <a:t>مِنْ مَزَايَاهَا أَنَّهَا آمِنَةٌ.</a:t>
@@ -51137,6 +51305,7 @@
                   <a:srgbClr val="1B3B6F"/>
                 </a:solidFill>
                 <a:latin typeface="Amiri" pitchFamily="2" charset="-78"/>
+                <a:ea typeface="Amiri" pitchFamily="2" charset="-78"/>
                 <a:cs typeface="Amiri" pitchFamily="2" charset="-78"/>
               </a:rPr>
               <a:t>تَسْتَغْرِقُ الرِّحْلَةُ نِصْفَ سَاعَةٍ.</a:t>
@@ -51216,6 +51385,7 @@
                   <a:srgbClr val="B83227"/>
                 </a:solidFill>
                 <a:latin typeface="Amiri" pitchFamily="2" charset="-78"/>
+                <a:ea typeface="Amiri" pitchFamily="2" charset="-78"/>
                 <a:cs typeface="Amiri" pitchFamily="2" charset="-78"/>
               </a:rPr>
               <a:t>يَسْتَغْرِقُ الرِّحْلَةُ نِصْفَ سَاعَةٍ.</a:t>
@@ -51372,6 +51542,7 @@
                   <a:srgbClr val="D4AF37"/>
                 </a:solidFill>
                 <a:latin typeface="Amiri" pitchFamily="2" charset="-78"/>
+                <a:ea typeface="Amiri" pitchFamily="2" charset="-78"/>
                 <a:cs typeface="Amiri" pitchFamily="2" charset="-78"/>
               </a:rPr>
               <a:t>م</a:t>
@@ -51692,6 +51863,7 @@
                   <a:srgbClr val="8A6D1E"/>
                 </a:solidFill>
                 <a:latin typeface="Amiri" pitchFamily="2" charset="-78"/>
+                <a:ea typeface="Amiri" pitchFamily="2" charset="-78"/>
                 <a:cs typeface="Amiri" pitchFamily="2" charset="-78"/>
               </a:rPr>
               <a:t>خُطَّةُ التَّقْيِيمِ</a:t>
@@ -52826,6 +52998,7 @@
                   <a:srgbClr val="D4AF37"/>
                 </a:solidFill>
                 <a:latin typeface="Amiri" pitchFamily="2" charset="-78"/>
+                <a:ea typeface="Amiri" pitchFamily="2" charset="-78"/>
                 <a:cs typeface="Amiri" pitchFamily="2" charset="-78"/>
               </a:rPr>
               <a:t>م</a:t>
@@ -53146,6 +53319,7 @@
                   <a:srgbClr val="8A6D1E"/>
                 </a:solidFill>
                 <a:latin typeface="Amiri" pitchFamily="2" charset="-78"/>
+                <a:ea typeface="Amiri" pitchFamily="2" charset="-78"/>
                 <a:cs typeface="Amiri" pitchFamily="2" charset="-78"/>
               </a:rPr>
               <a:t>الاِسْتِمَاعُ</a:t>
@@ -55069,6 +55243,7 @@
                   <a:srgbClr val="D4AF37"/>
                 </a:solidFill>
                 <a:latin typeface="Amiri" pitchFamily="2" charset="-78"/>
+                <a:ea typeface="Amiri" pitchFamily="2" charset="-78"/>
                 <a:cs typeface="Amiri" pitchFamily="2" charset="-78"/>
               </a:rPr>
               <a:t>م</a:t>
@@ -55389,6 +55564,7 @@
                   <a:srgbClr val="8A6D1E"/>
                 </a:solidFill>
                 <a:latin typeface="Amiri" pitchFamily="2" charset="-78"/>
+                <a:ea typeface="Amiri" pitchFamily="2" charset="-78"/>
                 <a:cs typeface="Amiri" pitchFamily="2" charset="-78"/>
               </a:rPr>
               <a:t>الإِجَابَاتُ</a:t>
@@ -55930,6 +56106,7 @@
                   <a:srgbClr val="8A6D1E"/>
                 </a:solidFill>
                 <a:latin typeface="Amiri" pitchFamily="2" charset="-78"/>
+                <a:ea typeface="Amiri" pitchFamily="2" charset="-78"/>
                 <a:cs typeface="Amiri" pitchFamily="2" charset="-78"/>
               </a:rPr>
               <a:t>ثُمَّ اِنْعَطِفْ يَمِينًا</a:t>
@@ -56433,6 +56610,7 @@
                   <a:srgbClr val="8A6D1E"/>
                 </a:solidFill>
                 <a:latin typeface="Amiri" pitchFamily="2" charset="-78"/>
+                <a:ea typeface="Amiri" pitchFamily="2" charset="-78"/>
                 <a:cs typeface="Amiri" pitchFamily="2" charset="-78"/>
               </a:rPr>
               <a:t>بِمَكْتَبَةٍ كَبِيرَةٍ عَلَى يَسَارِكَ</a:t>
@@ -56936,6 +57114,7 @@
                   <a:srgbClr val="8A6D1E"/>
                 </a:solidFill>
                 <a:latin typeface="Amiri" pitchFamily="2" charset="-78"/>
+                <a:ea typeface="Amiri" pitchFamily="2" charset="-78"/>
                 <a:cs typeface="Amiri" pitchFamily="2" charset="-78"/>
               </a:rPr>
               <a:t>وَالمَحَطَّةُ خَلْفَ المَكْتَبَةِ</a:t>
@@ -57439,6 +57618,7 @@
                   <a:srgbClr val="8A6D1E"/>
                 </a:solidFill>
                 <a:latin typeface="Amiri" pitchFamily="2" charset="-78"/>
+                <a:ea typeface="Amiri" pitchFamily="2" charset="-78"/>
                 <a:cs typeface="Amiri" pitchFamily="2" charset="-78"/>
               </a:rPr>
               <a:t>عَشْرَ دَقَائِقَ مَشْيًا</a:t>
@@ -57537,13 +57717,9 @@
     <a:fontScheme name="Office">
       <a:majorFont>
         <a:latin typeface="Calibri Light" panose="020F0302020204030204"/>
-        <a:ea typeface=""/>
-        <a:cs typeface=""/>
-        <a:font script="Jpan" typeface="游ゴシック Light"/>
-        <a:font script="Hang" typeface="맑은 고딕"/>
-        <a:font script="Hans" typeface="等线 Light"/>
-        <a:font script="Hant" typeface="新細明體"/>
-        <a:font script="Arab" typeface="Times New Roman"/>
+        <a:ea typeface="Amiri" pitchFamily="2" charset="-78"/>
+        <a:cs typeface="Amiri" pitchFamily="2" charset="-78"/>
+        <a:font script="Arab" typeface="Amiri"/>
         <a:font script="Hebr" typeface="Times New Roman"/>
         <a:font script="Thai" typeface="Angsana New"/>
         <a:font script="Ethi" typeface="Nyala"/>
@@ -57589,13 +57765,9 @@
       </a:majorFont>
       <a:minorFont>
         <a:latin typeface="Calibri" panose="020F0502020204030204"/>
-        <a:ea typeface=""/>
-        <a:cs typeface=""/>
-        <a:font script="Jpan" typeface="游ゴシック"/>
-        <a:font script="Hang" typeface="맑은 고딕"/>
-        <a:font script="Hans" typeface="等线"/>
-        <a:font script="Hant" typeface="新細明體"/>
-        <a:font script="Arab" typeface="Arial"/>
+        <a:ea typeface="Amiri" pitchFamily="2" charset="-78"/>
+        <a:cs typeface="Amiri" pitchFamily="2" charset="-78"/>
+        <a:font script="Arab" typeface="Amiri"/>
         <a:font script="Hebr" typeface="Arial"/>
         <a:font script="Thai" typeface="Cordia New"/>
         <a:font script="Ethi" typeface="Nyala"/>
